--- a/assets/connpass-eyecatch/P032_eyecatch_temp.pptx
+++ b/assets/connpass-eyecatch/P032_eyecatch_temp.pptx
@@ -8857,21 +8857,54 @@
                 <a:ea typeface="Noto Sans JP" pitchFamily="34" charset="-122"/>
                 <a:cs typeface="Noto Sans JP" pitchFamily="34" charset="-120"/>
               </a:rPr>
-              <a:t>PA45　【ファイル整理×</a:t>
-            </a:r>
-            <a:r>
-              <a:rPr lang="en-US" sz="4000" b="1" kern="0" spc="-112">
-                <a:solidFill>
-                  <a:srgbClr val="7C3AED"/>
+              <a:t>PA45　【ファイル整理×OneDrive編】</a:t>
+            </a:r>
+            <a:endParaRPr lang="en-US" sz="3200" dirty="0"/>
+          </a:p>
+        </p:txBody>
+      </p:sp>
+      <p:sp>
+        <p:nvSpPr>
+          <p:cNvPr id="13" name="Text 9"/>
+          <p:cNvSpPr txBox="1"/>
+          <p:nvPr/>
+        </p:nvSpPr>
+        <p:spPr>
+          <a:xfrm>
+            <a:off x="684391" y="2865204"/>
+            <a:ext cx="12536294" cy="715061"/>
+          </a:xfrm>
+          <a:prstGeom prst="rect">
+            <a:avLst/>
+          </a:prstGeom>
+          <a:noFill/>
+          <a:ln/>
+        </p:spPr>
+        <p:txBody>
+          <a:bodyPr wrap="square" lIns="0" tIns="0" rIns="0" bIns="0" rtlCol="0" anchor="ctr"/>
+          <a:lstStyle/>
+          <a:p>
+            <a:pPr marL="0" indent="0" algn="l">
+              <a:buNone/>
+            </a:pPr>
+            <a:r>
+              <a:rPr lang="en-US" sz="4500" b="1" dirty="0">
+                <a:solidFill>
+                  <a:srgbClr val="1F2937"/>
                 </a:solidFill>
                 <a:latin typeface="Noto Sans JP" pitchFamily="34" charset="0"/>
                 <a:ea typeface="Noto Sans JP" pitchFamily="34" charset="-122"/>
                 <a:cs typeface="Noto Sans JP" pitchFamily="34" charset="-120"/>
               </a:rPr>
-              <a:t>Copilot</a:t>
-            </a:r>
-            <a:r>
-              <a:rPr lang="en-US" sz="4000" b="1" kern="0" spc="-112">
+              <a:t>第32回：置くだけで片付く</a:t>
+            </a:r>
+          </a:p>
+          <a:p>
+            <a:pPr marL="0" indent="0" algn="l">
+              <a:buNone/>
+            </a:pPr>
+            <a:r>
+              <a:rPr lang="en-US" sz="4500" b="1">
                 <a:solidFill>
                   <a:srgbClr val="1F2937"/>
                 </a:solidFill>
@@ -8879,38 +8912,15 @@
                 <a:ea typeface="Noto Sans JP" pitchFamily="34" charset="-122"/>
                 <a:cs typeface="Noto Sans JP" pitchFamily="34" charset="-120"/>
               </a:rPr>
-              <a:t>編】</a:t>
-            </a:r>
-            <a:endParaRPr lang="en-US" sz="3200" dirty="0"/>
-          </a:p>
-        </p:txBody>
-      </p:sp>
-      <p:sp>
-        <p:nvSpPr>
-          <p:cNvPr id="13" name="Text 9"/>
-          <p:cNvSpPr txBox="1"/>
-          <p:nvPr/>
-        </p:nvSpPr>
-        <p:spPr>
-          <a:xfrm>
-            <a:off x="684391" y="2865204"/>
-            <a:ext cx="12536294" cy="715061"/>
-          </a:xfrm>
-          <a:prstGeom prst="rect">
-            <a:avLst/>
-          </a:prstGeom>
-          <a:noFill/>
-          <a:ln/>
-        </p:spPr>
-        <p:txBody>
-          <a:bodyPr wrap="square" lIns="0" tIns="0" rIns="0" bIns="0" rtlCol="0" anchor="ctr"/>
-          <a:lstStyle/>
+              <a:t>月別フォルダのファイル整理</a:t>
+            </a:r>
+          </a:p>
           <a:p>
             <a:pPr marL="0" indent="0" algn="l">
               <a:buNone/>
             </a:pPr>
             <a:r>
-              <a:rPr lang="en-US" sz="4500" b="1" dirty="0">
+              <a:rPr lang="en-US" sz="4500" b="1">
                 <a:solidFill>
                   <a:srgbClr val="1F2937"/>
                 </a:solidFill>
@@ -8918,61 +8928,7 @@
                 <a:ea typeface="Noto Sans JP" pitchFamily="34" charset="-122"/>
                 <a:cs typeface="Noto Sans JP" pitchFamily="34" charset="-120"/>
               </a:rPr>
-              <a:t>第32回：置くだけで片付く</a:t>
-            </a:r>
-          </a:p>
-          <a:p>
-            <a:pPr marL="0" indent="0" algn="l">
-              <a:buNone/>
-            </a:pPr>
-            <a:r>
-              <a:rPr lang="en-US" sz="4500" b="1">
-                <a:solidFill>
-                  <a:srgbClr val="1F2937"/>
-                </a:solidFill>
-                <a:latin typeface="Noto Sans JP" pitchFamily="34" charset="0"/>
-                <a:ea typeface="Noto Sans JP" pitchFamily="34" charset="-122"/>
-                <a:cs typeface="Noto Sans JP" pitchFamily="34" charset="-120"/>
-              </a:rPr>
-              <a:t>月別・種類別のファイル整理</a:t>
-            </a:r>
-          </a:p>
-          <a:p>
-            <a:pPr marL="0" indent="0" algn="l">
-              <a:buNone/>
-            </a:pPr>
-            <a:r>
-              <a:rPr lang="en-US" sz="4500" b="1">
-                <a:solidFill>
-                  <a:srgbClr val="1F2937"/>
-                </a:solidFill>
-                <a:latin typeface="Noto Sans JP" pitchFamily="34" charset="0"/>
-                <a:ea typeface="Noto Sans JP" pitchFamily="34" charset="-122"/>
-                <a:cs typeface="Noto Sans JP" pitchFamily="34" charset="-120"/>
-              </a:rPr>
-              <a:t>月のフォルダ名の式は</a:t>
-            </a:r>
-            <a:r>
-              <a:rPr lang="en-US" sz="4500" b="1">
-                <a:solidFill>
-                  <a:srgbClr val="7C3AED"/>
-                </a:solidFill>
-                <a:latin typeface="Noto Sans JP" pitchFamily="34" charset="0"/>
-                <a:ea typeface="Noto Sans JP" pitchFamily="34" charset="-122"/>
-                <a:cs typeface="Noto Sans JP" pitchFamily="34" charset="-120"/>
-              </a:rPr>
-              <a:t>Copilot</a:t>
-            </a:r>
-            <a:r>
-              <a:rPr lang="en-US" sz="4500" b="1">
-                <a:solidFill>
-                  <a:srgbClr val="1F2937"/>
-                </a:solidFill>
-                <a:latin typeface="Noto Sans JP" pitchFamily="34" charset="0"/>
-                <a:ea typeface="Noto Sans JP" pitchFamily="34" charset="-122"/>
-                <a:cs typeface="Noto Sans JP" pitchFamily="34" charset="-120"/>
-              </a:rPr>
-              <a:t>と</a:t>
+              <a:t>置いたら動くフローを作る</a:t>
             </a:r>
             <a:endParaRPr lang="en-US" sz="4500" dirty="0"/>
           </a:p>
@@ -9045,7 +9001,7 @@
                 <a:ea typeface="Noto Sans JP" pitchFamily="34" charset="-122"/>
                 <a:cs typeface="Noto Sans JP" pitchFamily="34" charset="-120"/>
               </a:rPr>
-              <a:t>Theme　置いたファイルを日付つきの名前で、種類別・月別のフォルダへ移す</a:t>
+              <a:t>Theme　受け取りフォルダに置いたファイルを、その月のフォルダへ移す</a:t>
             </a:r>
             <a:endParaRPr lang="en-US" dirty="0"/>
           </a:p>
